--- a/docs/content/analysis_of_variance/analysis_of_variance_lecture.pptx
+++ b/docs/content/analysis_of_variance/analysis_of_variance_lecture.pptx
@@ -6042,7 +6042,7 @@
         </p:blipFill>
         <p:spPr bwMode="auto">
           <a:xfrm>
-            <a:off x="6121400" y="1993900"/>
+            <a:off x="6121400" y="1739900"/>
             <a:ext cx="2781300" cy="1816100"/>
           </a:xfrm>
           <a:prstGeom prst="rect">
@@ -6056,6 +6056,38 @@
           </a:ln>
         </p:spPr>
       </p:pic>
+      <p:sp>
+        <p:nvSpPr>
+          <p:cNvPr id="1" name="TextBox 3"/>
+          <p:cNvSpPr txBox="1"/>
+          <p:nvPr>
+            <p:ph idx="1"/>
+          </p:nvPr>
+        </p:nvSpPr>
+        <p:spPr>
+          <a:xfrm>
+            <a:off x="6121400" y="4622800"/>
+            <a:ext cx="2781300" cy="508000"/>
+          </a:xfrm>
+          <a:prstGeom prst="rect">
+            <a:avLst/>
+          </a:prstGeom>
+          <a:noFill/>
+        </p:spPr>
+        <p:txBody>
+          <a:bodyPr/>
+          <a:lstStyle/>
+          <a:p>
+            <a:pPr lvl="0" indent="0" marL="0" algn="ctr">
+              <a:buNone/>
+            </a:pPr>
+            <a:r>
+              <a:rPr/>
+              <a:t>XKCD comic ‘Linear Regression’: a scatterplot of scattered points with a nearly flat fitted regression line labeled R-squared = 0.06 next to the same points connected into a constellation-like stick figure labeled ‘Rexthor, the Dog-Bearer’, captioned ‘I don’t trust linear regressions when it’s harder to guess the direction of the correlation from the scatter plot than to find new constellations on it.’</a:t>
+            </a:r>
+          </a:p>
+        </p:txBody>
+      </p:sp>
     </p:spTree>
   </p:cSld>
 </p:sld>
@@ -7849,8 +7881,8 @@
         </p:blipFill>
         <p:spPr bwMode="auto">
           <a:xfrm>
-            <a:off x="393700" y="660400"/>
-            <a:ext cx="5219700" cy="4470400"/>
+            <a:off x="685800" y="660400"/>
+            <a:ext cx="4622800" cy="3962400"/>
           </a:xfrm>
           <a:prstGeom prst="rect">
             <a:avLst/>
@@ -7863,6 +7895,38 @@
           </a:ln>
         </p:spPr>
       </p:pic>
+      <p:sp>
+        <p:nvSpPr>
+          <p:cNvPr id="1" name="TextBox 3"/>
+          <p:cNvSpPr txBox="1"/>
+          <p:nvPr>
+            <p:ph idx="1"/>
+          </p:nvPr>
+        </p:nvSpPr>
+        <p:spPr>
+          <a:xfrm>
+            <a:off x="0" y="4622800"/>
+            <a:ext cx="6007100" cy="508000"/>
+          </a:xfrm>
+          <a:prstGeom prst="rect">
+            <a:avLst/>
+          </a:prstGeom>
+          <a:noFill/>
+        </p:spPr>
+        <p:txBody>
+          <a:bodyPr/>
+          <a:lstStyle/>
+          <a:p>
+            <a:pPr lvl="0" indent="0" marL="0" algn="ctr">
+              <a:buNone/>
+            </a:pPr>
+            <a:r>
+              <a:rPr/>
+              <a:t>Multi-panel model diagnostic figure generated by performance::check_model(), including residual, normality, homogeneity of variance, and collinearity panels with built-in reference bands.</a:t>
+            </a:r>
+          </a:p>
+        </p:txBody>
+      </p:sp>
       <p:sp>
         <p:nvSpPr>
           <p:cNvPr id="4" name="Content Placeholder 3"/>
